--- a/spring/sem_10_smart_pointers/presentations/sem_10_smart_ptrs.pptx
+++ b/spring/sem_10_smart_pointers/presentations/sem_10_smart_ptrs.pptx
@@ -20,6 +20,7 @@
     <p:sldId id="268" r:id="rId14"/>
     <p:sldId id="269" r:id="rId15"/>
     <p:sldId id="270" r:id="rId16"/>
+    <p:sldId id="271" r:id="rId17"/>
   </p:sldIdLst>
   <p:sldSz cx="12192000" cy="6858000"/>
   <p:notesSz cx="12192000" cy="6858000"/>
@@ -4273,6 +4274,393 @@
     <p:extLst>
       <p:ext uri="{BB962C8B-B14F-4D97-AF65-F5344CB8AC3E}">
         <p14:creationId xmlns:p14="http://schemas.microsoft.com/office/powerpoint/2010/main" val="702434050"/>
+      </p:ext>
+    </p:extLst>
+  </p:cSld>
+  <p:clrMapOvr>
+    <a:masterClrMapping/>
+  </p:clrMapOvr>
+</p:sld>
+</file>
+
+<file path=ppt/slides/slide16.xml><?xml version="1.0" encoding="utf-8"?>
+<p:sld xmlns:a="http://schemas.openxmlformats.org/drawingml/2006/main" xmlns:r="http://schemas.openxmlformats.org/officeDocument/2006/relationships" xmlns:p="http://schemas.openxmlformats.org/presentationml/2006/main">
+  <p:cSld>
+    <p:spTree>
+      <p:nvGrpSpPr>
+        <p:cNvPr id="1" name=""/>
+        <p:cNvGrpSpPr/>
+        <p:nvPr/>
+      </p:nvGrpSpPr>
+      <p:grpSpPr>
+        <a:xfrm>
+          <a:off x="0" y="0"/>
+          <a:ext cx="0" cy="0"/>
+          <a:chOff x="0" y="0"/>
+          <a:chExt cx="0" cy="0"/>
+        </a:xfrm>
+      </p:grpSpPr>
+      <p:sp>
+        <p:nvSpPr>
+          <p:cNvPr id="2" name="Title 1">
+            <a:extLst>
+              <a:ext uri="{FF2B5EF4-FFF2-40B4-BE49-F238E27FC236}">
+                <a16:creationId xmlns:a16="http://schemas.microsoft.com/office/drawing/2014/main" id="{E2DB4262-E78A-4B75-8E1F-87FB97F05A16}"/>
+              </a:ext>
+            </a:extLst>
+          </p:cNvPr>
+          <p:cNvSpPr>
+            <a:spLocks noGrp="1"/>
+          </p:cNvSpPr>
+          <p:nvPr>
+            <p:ph type="title"/>
+          </p:nvPr>
+        </p:nvSpPr>
+        <p:spPr>
+          <a:xfrm>
+            <a:off x="838200" y="56827"/>
+            <a:ext cx="10515600" cy="1325563"/>
+          </a:xfrm>
+        </p:spPr>
+        <p:txBody>
+          <a:bodyPr/>
+          <a:lstStyle/>
+          <a:p>
+            <a:r>
+              <a:rPr lang="en-US" dirty="0"/>
+              <a:t>Garbage Collectors</a:t>
+            </a:r>
+            <a:endParaRPr lang="ru-RU" dirty="0"/>
+          </a:p>
+        </p:txBody>
+      </p:sp>
+      <p:sp>
+        <p:nvSpPr>
+          <p:cNvPr id="3" name="Content Placeholder 2">
+            <a:extLst>
+              <a:ext uri="{FF2B5EF4-FFF2-40B4-BE49-F238E27FC236}">
+                <a16:creationId xmlns:a16="http://schemas.microsoft.com/office/drawing/2014/main" id="{CC2834FF-22BC-4470-A182-0ECC632B5E75}"/>
+              </a:ext>
+            </a:extLst>
+          </p:cNvPr>
+          <p:cNvSpPr>
+            <a:spLocks noGrp="1"/>
+          </p:cNvSpPr>
+          <p:nvPr>
+            <p:ph idx="1"/>
+          </p:nvPr>
+        </p:nvSpPr>
+        <p:spPr>
+          <a:xfrm>
+            <a:off x="6601272" y="1350731"/>
+            <a:ext cx="4536504" cy="4351338"/>
+          </a:xfrm>
+        </p:spPr>
+        <p:txBody>
+          <a:bodyPr/>
+          <a:lstStyle/>
+          <a:p>
+            <a:pPr algn="ctr"/>
+            <a:r>
+              <a:rPr lang="en-US" b="1" dirty="0"/>
+              <a:t>Reference Counting</a:t>
+            </a:r>
+            <a:endParaRPr lang="ru-RU" b="1" dirty="0"/>
+          </a:p>
+          <a:p>
+            <a:pPr marL="0" indent="0" algn="ctr">
+              <a:buNone/>
+            </a:pPr>
+            <a:r>
+              <a:rPr lang="ru-RU" dirty="0"/>
+              <a:t>Каждый объект поддерживает счётчик ссылок на него, если счётчик равен нулю – объект удаляется</a:t>
+            </a:r>
+          </a:p>
+        </p:txBody>
+      </p:sp>
+      <p:sp>
+        <p:nvSpPr>
+          <p:cNvPr id="4" name="Content Placeholder 2">
+            <a:extLst>
+              <a:ext uri="{FF2B5EF4-FFF2-40B4-BE49-F238E27FC236}">
+                <a16:creationId xmlns:a16="http://schemas.microsoft.com/office/drawing/2014/main" id="{9E4BBFF0-7367-40B2-94F0-5D20A585791B}"/>
+              </a:ext>
+            </a:extLst>
+          </p:cNvPr>
+          <p:cNvSpPr txBox="1">
+            <a:spLocks/>
+          </p:cNvSpPr>
+          <p:nvPr/>
+        </p:nvSpPr>
+        <p:spPr bwMode="auto">
+          <a:xfrm>
+            <a:off x="1127448" y="1364109"/>
+            <a:ext cx="5184576" cy="4351338"/>
+          </a:xfrm>
+          <a:prstGeom prst="rect">
+            <a:avLst/>
+          </a:prstGeom>
+        </p:spPr>
+        <p:txBody>
+          <a:bodyPr vert="horz" lIns="91440" tIns="45720" rIns="91440" bIns="45720" rtlCol="0">
+            <a:normAutofit/>
+          </a:bodyPr>
+          <a:lstStyle>
+            <a:lvl1pPr marL="228600" indent="-228600" algn="l" defTabSz="914400">
+              <a:lnSpc>
+                <a:spcPct val="90000"/>
+              </a:lnSpc>
+              <a:spcBef>
+                <a:spcPts val="1000"/>
+              </a:spcBef>
+              <a:buFont typeface="Arial"/>
+              <a:buChar char="•"/>
+              <a:defRPr sz="2800">
+                <a:solidFill>
+                  <a:schemeClr val="tx1"/>
+                </a:solidFill>
+                <a:latin typeface="+mn-lt"/>
+                <a:ea typeface="+mn-ea"/>
+                <a:cs typeface="+mn-cs"/>
+              </a:defRPr>
+            </a:lvl1pPr>
+            <a:lvl2pPr marL="685800" indent="-228600" algn="l" defTabSz="914400">
+              <a:lnSpc>
+                <a:spcPct val="90000"/>
+              </a:lnSpc>
+              <a:spcBef>
+                <a:spcPts val="500"/>
+              </a:spcBef>
+              <a:buFont typeface="Arial"/>
+              <a:buChar char="•"/>
+              <a:defRPr sz="2400">
+                <a:solidFill>
+                  <a:schemeClr val="tx1"/>
+                </a:solidFill>
+                <a:latin typeface="+mn-lt"/>
+                <a:ea typeface="+mn-ea"/>
+                <a:cs typeface="+mn-cs"/>
+              </a:defRPr>
+            </a:lvl2pPr>
+            <a:lvl3pPr marL="1143000" indent="-228600" algn="l" defTabSz="914400">
+              <a:lnSpc>
+                <a:spcPct val="90000"/>
+              </a:lnSpc>
+              <a:spcBef>
+                <a:spcPts val="500"/>
+              </a:spcBef>
+              <a:buFont typeface="Arial"/>
+              <a:buChar char="•"/>
+              <a:defRPr sz="2000">
+                <a:solidFill>
+                  <a:schemeClr val="tx1"/>
+                </a:solidFill>
+                <a:latin typeface="+mn-lt"/>
+                <a:ea typeface="+mn-ea"/>
+                <a:cs typeface="+mn-cs"/>
+              </a:defRPr>
+            </a:lvl3pPr>
+            <a:lvl4pPr marL="1600200" indent="-228600" algn="l" defTabSz="914400">
+              <a:lnSpc>
+                <a:spcPct val="90000"/>
+              </a:lnSpc>
+              <a:spcBef>
+                <a:spcPts val="500"/>
+              </a:spcBef>
+              <a:buFont typeface="Arial"/>
+              <a:buChar char="•"/>
+              <a:defRPr sz="1800">
+                <a:solidFill>
+                  <a:schemeClr val="tx1"/>
+                </a:solidFill>
+                <a:latin typeface="+mn-lt"/>
+                <a:ea typeface="+mn-ea"/>
+                <a:cs typeface="+mn-cs"/>
+              </a:defRPr>
+            </a:lvl4pPr>
+            <a:lvl5pPr marL="2057400" indent="-228600" algn="l" defTabSz="914400">
+              <a:lnSpc>
+                <a:spcPct val="90000"/>
+              </a:lnSpc>
+              <a:spcBef>
+                <a:spcPts val="500"/>
+              </a:spcBef>
+              <a:buFont typeface="Arial"/>
+              <a:buChar char="•"/>
+              <a:defRPr sz="1800">
+                <a:solidFill>
+                  <a:schemeClr val="tx1"/>
+                </a:solidFill>
+                <a:latin typeface="+mn-lt"/>
+                <a:ea typeface="+mn-ea"/>
+                <a:cs typeface="+mn-cs"/>
+              </a:defRPr>
+            </a:lvl5pPr>
+            <a:lvl6pPr marL="2514600" indent="-228600" algn="l" defTabSz="914400">
+              <a:lnSpc>
+                <a:spcPct val="90000"/>
+              </a:lnSpc>
+              <a:spcBef>
+                <a:spcPts val="500"/>
+              </a:spcBef>
+              <a:buFont typeface="Arial"/>
+              <a:buChar char="•"/>
+              <a:defRPr sz="1800">
+                <a:solidFill>
+                  <a:schemeClr val="tx1"/>
+                </a:solidFill>
+                <a:latin typeface="+mn-lt"/>
+                <a:ea typeface="+mn-ea"/>
+                <a:cs typeface="+mn-cs"/>
+              </a:defRPr>
+            </a:lvl6pPr>
+            <a:lvl7pPr marL="2971800" indent="-228600" algn="l" defTabSz="914400">
+              <a:lnSpc>
+                <a:spcPct val="90000"/>
+              </a:lnSpc>
+              <a:spcBef>
+                <a:spcPts val="500"/>
+              </a:spcBef>
+              <a:buFont typeface="Arial"/>
+              <a:buChar char="•"/>
+              <a:defRPr sz="1800">
+                <a:solidFill>
+                  <a:schemeClr val="tx1"/>
+                </a:solidFill>
+                <a:latin typeface="+mn-lt"/>
+                <a:ea typeface="+mn-ea"/>
+                <a:cs typeface="+mn-cs"/>
+              </a:defRPr>
+            </a:lvl7pPr>
+            <a:lvl8pPr marL="3429000" indent="-228600" algn="l" defTabSz="914400">
+              <a:lnSpc>
+                <a:spcPct val="90000"/>
+              </a:lnSpc>
+              <a:spcBef>
+                <a:spcPts val="500"/>
+              </a:spcBef>
+              <a:buFont typeface="Arial"/>
+              <a:buChar char="•"/>
+              <a:defRPr sz="1800">
+                <a:solidFill>
+                  <a:schemeClr val="tx1"/>
+                </a:solidFill>
+                <a:latin typeface="+mn-lt"/>
+                <a:ea typeface="+mn-ea"/>
+                <a:cs typeface="+mn-cs"/>
+              </a:defRPr>
+            </a:lvl8pPr>
+            <a:lvl9pPr marL="3886200" indent="-228600" algn="l" defTabSz="914400">
+              <a:lnSpc>
+                <a:spcPct val="90000"/>
+              </a:lnSpc>
+              <a:spcBef>
+                <a:spcPts val="500"/>
+              </a:spcBef>
+              <a:buFont typeface="Arial"/>
+              <a:buChar char="•"/>
+              <a:defRPr sz="1800">
+                <a:solidFill>
+                  <a:schemeClr val="tx1"/>
+                </a:solidFill>
+                <a:latin typeface="+mn-lt"/>
+                <a:ea typeface="+mn-ea"/>
+                <a:cs typeface="+mn-cs"/>
+              </a:defRPr>
+            </a:lvl9pPr>
+          </a:lstStyle>
+          <a:p>
+            <a:pPr algn="ctr"/>
+            <a:r>
+              <a:rPr lang="en-US" b="1" dirty="0"/>
+              <a:t>Tracing</a:t>
+            </a:r>
+          </a:p>
+          <a:p>
+            <a:pPr marL="0" indent="0">
+              <a:buNone/>
+            </a:pPr>
+            <a:r>
+              <a:rPr lang="ru-RU" dirty="0"/>
+              <a:t>Обходим граф доступности объектов начиная. Все недостижимые объекты считаются мусором и удаляются</a:t>
+            </a:r>
+          </a:p>
+        </p:txBody>
+      </p:sp>
+      <p:sp>
+        <p:nvSpPr>
+          <p:cNvPr id="5" name="TextBox 4">
+            <a:extLst>
+              <a:ext uri="{FF2B5EF4-FFF2-40B4-BE49-F238E27FC236}">
+                <a16:creationId xmlns:a16="http://schemas.microsoft.com/office/drawing/2014/main" id="{DD2A2E58-3D04-4A4C-89AD-0DCB06D2782B}"/>
+              </a:ext>
+            </a:extLst>
+          </p:cNvPr>
+          <p:cNvSpPr txBox="1"/>
+          <p:nvPr/>
+        </p:nvSpPr>
+        <p:spPr>
+          <a:xfrm>
+            <a:off x="6960096" y="6431841"/>
+            <a:ext cx="5544616" cy="369332"/>
+          </a:xfrm>
+          <a:prstGeom prst="rect">
+            <a:avLst/>
+          </a:prstGeom>
+          <a:noFill/>
+        </p:spPr>
+        <p:txBody>
+          <a:bodyPr wrap="square" rtlCol="0">
+            <a:spAutoFit/>
+          </a:bodyPr>
+          <a:lstStyle/>
+          <a:p>
+            <a:r>
+              <a:rPr lang="ru-RU" dirty="0"/>
+              <a:t>Статья </a:t>
+            </a:r>
+            <a:r>
+              <a:rPr lang="en-US" dirty="0"/>
+              <a:t>“A Unified Theory of Garbage Collection”</a:t>
+            </a:r>
+            <a:endParaRPr lang="ru-RU" dirty="0"/>
+          </a:p>
+        </p:txBody>
+      </p:sp>
+      <p:pic>
+        <p:nvPicPr>
+          <p:cNvPr id="7" name="Picture 6">
+            <a:extLst>
+              <a:ext uri="{FF2B5EF4-FFF2-40B4-BE49-F238E27FC236}">
+                <a16:creationId xmlns:a16="http://schemas.microsoft.com/office/drawing/2014/main" id="{0C4E2EED-90F2-4A4C-A550-B807ACD59398}"/>
+              </a:ext>
+            </a:extLst>
+          </p:cNvPr>
+          <p:cNvPicPr>
+            <a:picLocks noChangeAspect="1"/>
+          </p:cNvPicPr>
+          <p:nvPr/>
+        </p:nvPicPr>
+        <p:blipFill>
+          <a:blip r:embed="rId2"/>
+          <a:stretch>
+            <a:fillRect/>
+          </a:stretch>
+        </p:blipFill>
+        <p:spPr>
+          <a:xfrm>
+            <a:off x="3186895" y="4077072"/>
+            <a:ext cx="5818209" cy="2288845"/>
+          </a:xfrm>
+          <a:prstGeom prst="rect">
+            <a:avLst/>
+          </a:prstGeom>
+        </p:spPr>
+      </p:pic>
+    </p:spTree>
+    <p:extLst>
+      <p:ext uri="{BB962C8B-B14F-4D97-AF65-F5344CB8AC3E}">
+        <p14:creationId xmlns:p14="http://schemas.microsoft.com/office/powerpoint/2010/main" val="498462933"/>
       </p:ext>
     </p:extLst>
   </p:cSld>
